--- a/docs/deck/Aavaran_SIH2026_PS26171.pptx
+++ b/docs/deck/Aavaran_SIH2026_PS26171.pptx
@@ -9416,7 +9416,7 @@
                 </a:solidFill>
                 <a:latin typeface="Calibri"/>
               </a:rPr>
-              <a:t>YuNet FP32 0.2 MB · MobileCLIP-S0 image tower FP16 23 MB (prompt embeddings precomputed) · BERT-small PII INT8 29 MB</a:t>
+              <a:t>YuNet FP32 0.2 MB · MobileCLIP-S0 image tower FP16 22.9 MB (prompt embeddings precomputed) · BERT-small PII INT8 28.7 MB</a:t>
             </a:r>
           </a:p>
         </p:txBody>
@@ -11193,7 +11193,7 @@
                           </a:solidFill>
                           <a:latin typeface="Calibri"/>
                         </a:rPr>
-                        <a:t>52 MB total; measured precision choice (FP32 YuNet 2.6× faster than INT8 in WASM); eco mode 37 MB; caches make an unchanged frame ~0.15 s; WebGPU when present</a:t>
+                        <a:t>52 MB total; measured precision choice (FP32 YuNet 2.6× faster than INT8 in WASM, see docs/model-contract.md); eco mode 37 MB; caches make an unchanged frame ~0.14 s; WebGPU when present</a:t>
                       </a:r>
                     </a:p>
                   </a:txBody>

--- a/docs/deck/Aavaran_SIH2026_PS26171.pptx
+++ b/docs/deck/Aavaran_SIH2026_PS26171.pptx
@@ -242,10 +242,10 @@
                 <c:formatCode>General</c:formatCode>
                 <c:ptCount val="2"/>
                 <c:pt idx="0">
-                  <c:v>0.558</c:v>
+                  <c:v>0.391</c:v>
                 </c:pt>
                 <c:pt idx="1">
-                  <c:v>0.733</c:v>
+                  <c:v>0.54</c:v>
                 </c:pt>
               </c:numCache>
             </c:numRef>
@@ -7219,7 +7219,7 @@
                 </a:solidFill>
                 <a:latin typeface="Calibri"/>
               </a:rPr>
-              <a:t>a ViT fused with DOM structure understands unseen websites 73.3% vs 55.8% from pixels alone.</a:t>
+              <a:t>a ViT fused with DOM structure understands unseen websites 54.0% vs 39.1% from pixels alone.</a:t>
             </a:r>
           </a:p>
           <a:p>
@@ -10318,7 +10318,7 @@
                 </a:solidFill>
                 <a:latin typeface="Cambria"/>
               </a:rPr>
-              <a:t>73.3%</a:t>
+              <a:t>54.0%</a:t>
             </a:r>
           </a:p>
         </p:txBody>
@@ -10365,7 +10365,7 @@
                 </a:solidFill>
                 <a:latin typeface="Calibri"/>
               </a:rPr>
-              <a:t>unseen websites (96 sites)</a:t>
+              <a:t>unseen websites (? sites)</a:t>
             </a:r>
           </a:p>
         </p:txBody>
@@ -11397,7 +11397,7 @@
                           </a:solidFill>
                           <a:latin typeface="Calibri"/>
                         </a:rPr>
-                        <a:t>Fuse pixels with DOM structure (+17.5 pts on unseen sites); element grounding via DOM + Set-of-Marks is exact</a:t>
+                        <a:t>Fuse pixels with DOM structure (+14.9 pts on unseen sites); element grounding via DOM + Set-of-Marks is exact</a:t>
                       </a:r>
                     </a:p>
                   </a:txBody>
